--- a/Présentation_et_oral_de_stage_de_3eme_final.pptx
+++ b/Présentation_et_oral_de_stage_de_3eme_final.pptx
@@ -5,21 +5,17 @@
     <p:sldMasterId id="2147483648" r:id="rId1"/>
   </p:sldMasterIdLst>
   <p:notesMasterIdLst>
-    <p:notesMasterId r:id="rId14"/>
+    <p:notesMasterId r:id="rId10"/>
   </p:notesMasterIdLst>
   <p:sldIdLst>
     <p:sldId id="256" r:id="rId2"/>
     <p:sldId id="257" r:id="rId3"/>
     <p:sldId id="258" r:id="rId4"/>
     <p:sldId id="259" r:id="rId5"/>
-    <p:sldId id="260" r:id="rId6"/>
-    <p:sldId id="261" r:id="rId7"/>
-    <p:sldId id="262" r:id="rId8"/>
-    <p:sldId id="263" r:id="rId9"/>
-    <p:sldId id="264" r:id="rId10"/>
-    <p:sldId id="265" r:id="rId11"/>
-    <p:sldId id="266" r:id="rId12"/>
-    <p:sldId id="267" r:id="rId13"/>
+    <p:sldId id="262" r:id="rId6"/>
+    <p:sldId id="265" r:id="rId7"/>
+    <p:sldId id="268" r:id="rId8"/>
+    <p:sldId id="267" r:id="rId9"/>
   </p:sldIdLst>
   <p:sldSz cx="12192000" cy="6858000"/>
   <p:notesSz cx="6858000" cy="9144000"/>
@@ -542,91 +538,6 @@
 </p:notes>
 </file>
 
-<file path=ppt/notesSlides/notesSlide10.xml><?xml version="1.0" encoding="utf-8"?>
-<p:notes xmlns:a="http://schemas.openxmlformats.org/drawingml/2006/main" xmlns:r="http://schemas.openxmlformats.org/officeDocument/2006/relationships" xmlns:p="http://schemas.openxmlformats.org/presentationml/2006/main">
-  <p:cSld>
-    <p:spTree>
-      <p:nvGrpSpPr>
-        <p:cNvPr id="1" name=""/>
-        <p:cNvGrpSpPr/>
-        <p:nvPr/>
-      </p:nvGrpSpPr>
-      <p:grpSpPr bwMode="auto">
-        <a:xfrm>
-          <a:off x="0" y="0"/>
-          <a:ext cx="0" cy="0"/>
-          <a:chOff x="0" y="0"/>
-          <a:chExt cx="0" cy="0"/>
-        </a:xfrm>
-      </p:grpSpPr>
-      <p:sp>
-        <p:nvSpPr>
-          <p:cNvPr id="2" name="Slide Image Placeholder 1"/>
-          <p:cNvSpPr>
-            <a:spLocks noGrp="1" noRot="1" noChangeAspect="1"/>
-          </p:cNvSpPr>
-          <p:nvPr>
-            <p:ph type="sldImg"/>
-          </p:nvPr>
-        </p:nvSpPr>
-        <p:spPr bwMode="auto"/>
-      </p:sp>
-      <p:sp>
-        <p:nvSpPr>
-          <p:cNvPr id="3" name="Notes Placeholder 2"/>
-          <p:cNvSpPr>
-            <a:spLocks noGrp="1"/>
-          </p:cNvSpPr>
-          <p:nvPr>
-            <p:ph type="body" idx="1"/>
-          </p:nvPr>
-        </p:nvSpPr>
-        <p:spPr bwMode="auto"/>
-        <p:txBody>
-          <a:bodyPr/>
-          <a:lstStyle/>
-          <a:p>
-            <a:pPr>
-              <a:defRPr/>
-            </a:pPr>
-            <a:endParaRPr/>
-          </a:p>
-        </p:txBody>
-      </p:sp>
-      <p:sp>
-        <p:nvSpPr>
-          <p:cNvPr id="4" name="Slide Number Placeholder 3"/>
-          <p:cNvSpPr>
-            <a:spLocks noGrp="1"/>
-          </p:cNvSpPr>
-          <p:nvPr>
-            <p:ph type="sldNum" sz="quarter" idx="10"/>
-          </p:nvPr>
-        </p:nvSpPr>
-        <p:spPr bwMode="auto"/>
-        <p:txBody>
-          <a:bodyPr/>
-          <a:lstStyle/>
-          <a:p>
-            <a:pPr>
-              <a:defRPr/>
-            </a:pPr>
-            <a:fld id="{A1A2EE3F-C9BF-7ADA-BB83-04FFED13DC88}" type="slidenum">
-              <a:rPr/>
-              <a:t>10</a:t>
-            </a:fld>
-            <a:endParaRPr/>
-          </a:p>
-        </p:txBody>
-      </p:sp>
-    </p:spTree>
-  </p:cSld>
-  <p:clrMapOvr>
-    <a:masterClrMapping/>
-  </p:clrMapOvr>
-</p:notes>
-</file>
-
 <file path=ppt/notesSlides/notesSlide2.xml><?xml version="1.0" encoding="utf-8"?>
 <p:notes xmlns:a="http://schemas.openxmlformats.org/drawingml/2006/main" xmlns:r="http://schemas.openxmlformats.org/officeDocument/2006/relationships" xmlns:p="http://schemas.openxmlformats.org/presentationml/2006/main">
   <p:cSld>
@@ -951,7 +862,7 @@
             <a:pPr>
               <a:defRPr/>
             </a:pPr>
-            <a:fld id="{FC2E4227-3BAD-E214-27FE-0580360AD0AD}" type="slidenum">
+            <a:fld id="{7D886D90-3780-2318-C9D6-4E91911C344C}" type="slidenum">
               <a:rPr/>
               <a:t>5</a:t>
             </a:fld>
@@ -1036,264 +947,9 @@
             <a:pPr>
               <a:defRPr/>
             </a:pPr>
-            <a:fld id="{B868F8F2-C8DB-431E-D5A1-C68F9FAA30CB}" type="slidenum">
+            <a:fld id="{A1A2EE3F-C9BF-7ADA-BB83-04FFED13DC88}" type="slidenum">
               <a:rPr/>
               <a:t>6</a:t>
-            </a:fld>
-            <a:endParaRPr/>
-          </a:p>
-        </p:txBody>
-      </p:sp>
-    </p:spTree>
-  </p:cSld>
-  <p:clrMapOvr>
-    <a:masterClrMapping/>
-  </p:clrMapOvr>
-</p:notes>
-</file>
-
-<file path=ppt/notesSlides/notesSlide7.xml><?xml version="1.0" encoding="utf-8"?>
-<p:notes xmlns:a="http://schemas.openxmlformats.org/drawingml/2006/main" xmlns:r="http://schemas.openxmlformats.org/officeDocument/2006/relationships" xmlns:p="http://schemas.openxmlformats.org/presentationml/2006/main">
-  <p:cSld>
-    <p:spTree>
-      <p:nvGrpSpPr>
-        <p:cNvPr id="1" name=""/>
-        <p:cNvGrpSpPr/>
-        <p:nvPr/>
-      </p:nvGrpSpPr>
-      <p:grpSpPr bwMode="auto">
-        <a:xfrm>
-          <a:off x="0" y="0"/>
-          <a:ext cx="0" cy="0"/>
-          <a:chOff x="0" y="0"/>
-          <a:chExt cx="0" cy="0"/>
-        </a:xfrm>
-      </p:grpSpPr>
-      <p:sp>
-        <p:nvSpPr>
-          <p:cNvPr id="2" name="Slide Image Placeholder 1"/>
-          <p:cNvSpPr>
-            <a:spLocks noGrp="1" noRot="1" noChangeAspect="1"/>
-          </p:cNvSpPr>
-          <p:nvPr>
-            <p:ph type="sldImg"/>
-          </p:nvPr>
-        </p:nvSpPr>
-        <p:spPr bwMode="auto"/>
-      </p:sp>
-      <p:sp>
-        <p:nvSpPr>
-          <p:cNvPr id="3" name="Notes Placeholder 2"/>
-          <p:cNvSpPr>
-            <a:spLocks noGrp="1"/>
-          </p:cNvSpPr>
-          <p:nvPr>
-            <p:ph type="body" idx="1"/>
-          </p:nvPr>
-        </p:nvSpPr>
-        <p:spPr bwMode="auto"/>
-        <p:txBody>
-          <a:bodyPr/>
-          <a:lstStyle/>
-          <a:p>
-            <a:pPr>
-              <a:defRPr/>
-            </a:pPr>
-            <a:endParaRPr/>
-          </a:p>
-        </p:txBody>
-      </p:sp>
-      <p:sp>
-        <p:nvSpPr>
-          <p:cNvPr id="4" name="Slide Number Placeholder 3"/>
-          <p:cNvSpPr>
-            <a:spLocks noGrp="1"/>
-          </p:cNvSpPr>
-          <p:nvPr>
-            <p:ph type="sldNum" sz="quarter" idx="10"/>
-          </p:nvPr>
-        </p:nvSpPr>
-        <p:spPr bwMode="auto"/>
-        <p:txBody>
-          <a:bodyPr/>
-          <a:lstStyle/>
-          <a:p>
-            <a:pPr>
-              <a:defRPr/>
-            </a:pPr>
-            <a:fld id="{7D886D90-3780-2318-C9D6-4E91911C344C}" type="slidenum">
-              <a:rPr/>
-              <a:t>7</a:t>
-            </a:fld>
-            <a:endParaRPr/>
-          </a:p>
-        </p:txBody>
-      </p:sp>
-    </p:spTree>
-  </p:cSld>
-  <p:clrMapOvr>
-    <a:masterClrMapping/>
-  </p:clrMapOvr>
-</p:notes>
-</file>
-
-<file path=ppt/notesSlides/notesSlide8.xml><?xml version="1.0" encoding="utf-8"?>
-<p:notes xmlns:a="http://schemas.openxmlformats.org/drawingml/2006/main" xmlns:r="http://schemas.openxmlformats.org/officeDocument/2006/relationships" xmlns:p="http://schemas.openxmlformats.org/presentationml/2006/main">
-  <p:cSld>
-    <p:spTree>
-      <p:nvGrpSpPr>
-        <p:cNvPr id="1" name=""/>
-        <p:cNvGrpSpPr/>
-        <p:nvPr/>
-      </p:nvGrpSpPr>
-      <p:grpSpPr bwMode="auto">
-        <a:xfrm>
-          <a:off x="0" y="0"/>
-          <a:ext cx="0" cy="0"/>
-          <a:chOff x="0" y="0"/>
-          <a:chExt cx="0" cy="0"/>
-        </a:xfrm>
-      </p:grpSpPr>
-      <p:sp>
-        <p:nvSpPr>
-          <p:cNvPr id="2" name="Slide Image Placeholder 1"/>
-          <p:cNvSpPr>
-            <a:spLocks noGrp="1" noRot="1" noChangeAspect="1"/>
-          </p:cNvSpPr>
-          <p:nvPr>
-            <p:ph type="sldImg"/>
-          </p:nvPr>
-        </p:nvSpPr>
-        <p:spPr bwMode="auto"/>
-      </p:sp>
-      <p:sp>
-        <p:nvSpPr>
-          <p:cNvPr id="3" name="Notes Placeholder 2"/>
-          <p:cNvSpPr>
-            <a:spLocks noGrp="1"/>
-          </p:cNvSpPr>
-          <p:nvPr>
-            <p:ph type="body" idx="1"/>
-          </p:nvPr>
-        </p:nvSpPr>
-        <p:spPr bwMode="auto"/>
-        <p:txBody>
-          <a:bodyPr/>
-          <a:lstStyle/>
-          <a:p>
-            <a:pPr>
-              <a:defRPr/>
-            </a:pPr>
-            <a:endParaRPr/>
-          </a:p>
-        </p:txBody>
-      </p:sp>
-      <p:sp>
-        <p:nvSpPr>
-          <p:cNvPr id="4" name="Slide Number Placeholder 3"/>
-          <p:cNvSpPr>
-            <a:spLocks noGrp="1"/>
-          </p:cNvSpPr>
-          <p:nvPr>
-            <p:ph type="sldNum" sz="quarter" idx="10"/>
-          </p:nvPr>
-        </p:nvSpPr>
-        <p:spPr bwMode="auto"/>
-        <p:txBody>
-          <a:bodyPr/>
-          <a:lstStyle/>
-          <a:p>
-            <a:pPr>
-              <a:defRPr/>
-            </a:pPr>
-            <a:fld id="{FE75BD73-08B8-000D-00F8-CD342B513B66}" type="slidenum">
-              <a:rPr/>
-              <a:t>8</a:t>
-            </a:fld>
-            <a:endParaRPr/>
-          </a:p>
-        </p:txBody>
-      </p:sp>
-    </p:spTree>
-  </p:cSld>
-  <p:clrMapOvr>
-    <a:masterClrMapping/>
-  </p:clrMapOvr>
-</p:notes>
-</file>
-
-<file path=ppt/notesSlides/notesSlide9.xml><?xml version="1.0" encoding="utf-8"?>
-<p:notes xmlns:a="http://schemas.openxmlformats.org/drawingml/2006/main" xmlns:r="http://schemas.openxmlformats.org/officeDocument/2006/relationships" xmlns:p="http://schemas.openxmlformats.org/presentationml/2006/main">
-  <p:cSld>
-    <p:spTree>
-      <p:nvGrpSpPr>
-        <p:cNvPr id="1" name=""/>
-        <p:cNvGrpSpPr/>
-        <p:nvPr/>
-      </p:nvGrpSpPr>
-      <p:grpSpPr bwMode="auto">
-        <a:xfrm>
-          <a:off x="0" y="0"/>
-          <a:ext cx="0" cy="0"/>
-          <a:chOff x="0" y="0"/>
-          <a:chExt cx="0" cy="0"/>
-        </a:xfrm>
-      </p:grpSpPr>
-      <p:sp>
-        <p:nvSpPr>
-          <p:cNvPr id="2" name="Slide Image Placeholder 1"/>
-          <p:cNvSpPr>
-            <a:spLocks noGrp="1" noRot="1" noChangeAspect="1"/>
-          </p:cNvSpPr>
-          <p:nvPr>
-            <p:ph type="sldImg"/>
-          </p:nvPr>
-        </p:nvSpPr>
-        <p:spPr bwMode="auto"/>
-      </p:sp>
-      <p:sp>
-        <p:nvSpPr>
-          <p:cNvPr id="3" name="Notes Placeholder 2"/>
-          <p:cNvSpPr>
-            <a:spLocks noGrp="1"/>
-          </p:cNvSpPr>
-          <p:nvPr>
-            <p:ph type="body" idx="1"/>
-          </p:nvPr>
-        </p:nvSpPr>
-        <p:spPr bwMode="auto"/>
-        <p:txBody>
-          <a:bodyPr/>
-          <a:lstStyle/>
-          <a:p>
-            <a:pPr>
-              <a:defRPr/>
-            </a:pPr>
-            <a:endParaRPr/>
-          </a:p>
-        </p:txBody>
-      </p:sp>
-      <p:sp>
-        <p:nvSpPr>
-          <p:cNvPr id="4" name="Slide Number Placeholder 3"/>
-          <p:cNvSpPr>
-            <a:spLocks noGrp="1"/>
-          </p:cNvSpPr>
-          <p:nvPr>
-            <p:ph type="sldNum" sz="quarter" idx="10"/>
-          </p:nvPr>
-        </p:nvSpPr>
-        <p:spPr bwMode="auto"/>
-        <p:txBody>
-          <a:bodyPr/>
-          <a:lstStyle/>
-          <a:p>
-            <a:pPr>
-              <a:defRPr/>
-            </a:pPr>
-            <a:fld id="{4FDF4FE8-0456-583E-34F5-04651B8408D9}" type="slidenum">
-              <a:rPr/>
-              <a:t>9</a:t>
             </a:fld>
             <a:endParaRPr/>
           </a:p>
@@ -1535,7 +1191,7 @@
             </a:pPr>
             <a:fld id="{B61BEF0D-F0BB-DE4B-95CE-6DB70DBA9567}" type="datetimeFigureOut">
               <a:rPr lang="en-US"/>
-              <a:t>2/27/2026</a:t>
+              <a:t>5/15/2026</a:t>
             </a:fld>
             <a:endParaRPr lang="en-US"/>
           </a:p>
@@ -1871,7 +1527,7 @@
             </a:pPr>
             <a:fld id="{B61BEF0D-F0BB-DE4B-95CE-6DB70DBA9567}" type="datetimeFigureOut">
               <a:rPr lang="en-US"/>
-              <a:t>2/27/2026</a:t>
+              <a:t>5/15/2026</a:t>
             </a:fld>
             <a:endParaRPr lang="en-US"/>
           </a:p>
@@ -2151,7 +1807,7 @@
             </a:pPr>
             <a:fld id="{B61BEF0D-F0BB-DE4B-95CE-6DB70DBA9567}" type="datetimeFigureOut">
               <a:rPr lang="en-US"/>
-              <a:t>2/27/2026</a:t>
+              <a:t>5/15/2026</a:t>
             </a:fld>
             <a:endParaRPr lang="en-US"/>
           </a:p>
@@ -2700,7 +2356,7 @@
             </a:pPr>
             <a:fld id="{B61BEF0D-F0BB-DE4B-95CE-6DB70DBA9567}" type="datetimeFigureOut">
               <a:rPr lang="en-US"/>
-              <a:t>2/27/2026</a:t>
+              <a:t>5/15/2026</a:t>
             </a:fld>
             <a:endParaRPr lang="en-US"/>
           </a:p>
@@ -2980,7 +2636,7 @@
             </a:pPr>
             <a:fld id="{B61BEF0D-F0BB-DE4B-95CE-6DB70DBA9567}" type="datetimeFigureOut">
               <a:rPr lang="en-US"/>
-              <a:t>2/27/2026</a:t>
+              <a:t>5/15/2026</a:t>
             </a:fld>
             <a:endParaRPr lang="en-US"/>
           </a:p>
@@ -3521,7 +3177,7 @@
             </a:pPr>
             <a:fld id="{B61BEF0D-F0BB-DE4B-95CE-6DB70DBA9567}" type="datetimeFigureOut">
               <a:rPr lang="en-US"/>
-              <a:t>2/27/2026</a:t>
+              <a:t>5/15/2026</a:t>
             </a:fld>
             <a:endParaRPr lang="en-US"/>
           </a:p>
@@ -3850,7 +3506,7 @@
             </a:pPr>
             <a:fld id="{B61BEF0D-F0BB-DE4B-95CE-6DB70DBA9567}" type="datetimeFigureOut">
               <a:rPr lang="en-US"/>
-              <a:t>2/27/2026</a:t>
+              <a:t>5/15/2026</a:t>
             </a:fld>
             <a:endParaRPr lang="en-US"/>
           </a:p>
@@ -4037,7 +3693,7 @@
             </a:pPr>
             <a:fld id="{B61BEF0D-F0BB-DE4B-95CE-6DB70DBA9567}" type="datetimeFigureOut">
               <a:rPr lang="en-US"/>
-              <a:t>2/27/2026</a:t>
+              <a:t>5/15/2026</a:t>
             </a:fld>
             <a:endParaRPr lang="en-US"/>
           </a:p>
@@ -4291,7 +3947,7 @@
             </a:pPr>
             <a:fld id="{B61BEF0D-F0BB-DE4B-95CE-6DB70DBA9567}" type="datetimeFigureOut">
               <a:rPr lang="en-US"/>
-              <a:t>2/27/2026</a:t>
+              <a:t>5/15/2026</a:t>
             </a:fld>
             <a:endParaRPr lang="en-US"/>
           </a:p>
@@ -4504,7 +4160,7 @@
             </a:pPr>
             <a:fld id="{B61BEF0D-F0BB-DE4B-95CE-6DB70DBA9567}" type="datetimeFigureOut">
               <a:rPr lang="en-US"/>
-              <a:t>2/27/2026</a:t>
+              <a:t>5/15/2026</a:t>
             </a:fld>
             <a:endParaRPr lang="en-US"/>
           </a:p>
@@ -4782,7 +4438,7 @@
             </a:pPr>
             <a:fld id="{B61BEF0D-F0BB-DE4B-95CE-6DB70DBA9567}" type="datetimeFigureOut">
               <a:rPr lang="en-US"/>
-              <a:t>2/27/2026</a:t>
+              <a:t>5/15/2026</a:t>
             </a:fld>
             <a:endParaRPr lang="en-US"/>
           </a:p>
@@ -5075,7 +4731,7 @@
             </a:pPr>
             <a:fld id="{B61BEF0D-F0BB-DE4B-95CE-6DB70DBA9567}" type="datetimeFigureOut">
               <a:rPr lang="en-US"/>
-              <a:t>2/27/2026</a:t>
+              <a:t>5/15/2026</a:t>
             </a:fld>
             <a:endParaRPr lang="en-US"/>
           </a:p>
@@ -5490,7 +5146,7 @@
             </a:pPr>
             <a:fld id="{B61BEF0D-F0BB-DE4B-95CE-6DB70DBA9567}" type="datetimeFigureOut">
               <a:rPr lang="en-US"/>
-              <a:t>2/27/2026</a:t>
+              <a:t>5/15/2026</a:t>
             </a:fld>
             <a:endParaRPr lang="en-US"/>
           </a:p>
@@ -5637,7 +5293,7 @@
             </a:pPr>
             <a:fld id="{B61BEF0D-F0BB-DE4B-95CE-6DB70DBA9567}" type="datetimeFigureOut">
               <a:rPr lang="en-US"/>
-              <a:t>2/27/2026</a:t>
+              <a:t>5/15/2026</a:t>
             </a:fld>
             <a:endParaRPr lang="en-US"/>
           </a:p>
@@ -5758,7 +5414,7 @@
             </a:pPr>
             <a:fld id="{B61BEF0D-F0BB-DE4B-95CE-6DB70DBA9567}" type="datetimeFigureOut">
               <a:rPr lang="en-US"/>
-              <a:t>2/27/2026</a:t>
+              <a:t>5/15/2026</a:t>
             </a:fld>
             <a:endParaRPr lang="en-US"/>
           </a:p>
@@ -6059,7 +5715,7 @@
             </a:pPr>
             <a:fld id="{B61BEF0D-F0BB-DE4B-95CE-6DB70DBA9567}" type="datetimeFigureOut">
               <a:rPr lang="en-US"/>
-              <a:t>2/27/2026</a:t>
+              <a:t>5/15/2026</a:t>
             </a:fld>
             <a:endParaRPr lang="en-US"/>
           </a:p>
@@ -6385,7 +6041,7 @@
             </a:pPr>
             <a:fld id="{B61BEF0D-F0BB-DE4B-95CE-6DB70DBA9567}" type="datetimeFigureOut">
               <a:rPr lang="en-US"/>
-              <a:t>2/27/2026</a:t>
+              <a:t>5/15/2026</a:t>
             </a:fld>
             <a:endParaRPr lang="en-US"/>
           </a:p>
@@ -6619,7 +6275,7 @@
             </a:pPr>
             <a:fld id="{B61BEF0D-F0BB-DE4B-95CE-6DB70DBA9567}" type="datetimeFigureOut">
               <a:rPr lang="en-US"/>
-              <a:t>2/27/2026</a:t>
+              <a:t>5/15/2026</a:t>
             </a:fld>
             <a:endParaRPr lang="en-US"/>
           </a:p>
@@ -7198,7 +6854,7 @@
             </a:pPr>
             <a:r>
               <a:rPr lang="fr-FR" dirty="0" err="1"/>
-              <a:t>College</a:t>
+              <a:t>CollEge</a:t>
             </a:r>
             <a:r>
               <a:rPr lang="fr-FR" dirty="0"/>
@@ -7266,381 +6922,12 @@
         <p:split orient="vert" dir="in"/>
       </p:transition>
     </mc:Choice>
-    <mc:Fallback xmlns="" xmlns:m="http://schemas.openxmlformats.org/officeDocument/2006/math" xmlns:w="http://schemas.openxmlformats.org/wordprocessingml/2006/main">
+    <mc:Fallback xmlns:w="http://schemas.openxmlformats.org/wordprocessingml/2006/main" xmlns:m="http://schemas.openxmlformats.org/officeDocument/2006/math" xmlns="">
       <p:transition spd="slow" advClick="0">
         <p:split orient="vert" dir="in"/>
       </p:transition>
     </mc:Fallback>
   </mc:AlternateContent>
-</p:sld>
-</file>
-
-<file path=ppt/slides/slide10.xml><?xml version="1.0" encoding="utf-8"?>
-<p:sld xmlns:a="http://schemas.openxmlformats.org/drawingml/2006/main" xmlns:r="http://schemas.openxmlformats.org/officeDocument/2006/relationships" xmlns:p="http://schemas.openxmlformats.org/presentationml/2006/main" showMasterPhAnim="0">
-  <p:cSld>
-    <p:spTree>
-      <p:nvGrpSpPr>
-        <p:cNvPr id="1" name=""/>
-        <p:cNvGrpSpPr/>
-        <p:nvPr/>
-      </p:nvGrpSpPr>
-      <p:grpSpPr bwMode="auto">
-        <a:xfrm>
-          <a:off x="0" y="0"/>
-          <a:ext cx="0" cy="0"/>
-          <a:chOff x="0" y="0"/>
-          <a:chExt cx="0" cy="0"/>
-        </a:xfrm>
-      </p:grpSpPr>
-      <p:sp>
-        <p:nvSpPr>
-          <p:cNvPr id="2" name="Titre 1"/>
-          <p:cNvSpPr>
-            <a:spLocks noGrp="1"/>
-          </p:cNvSpPr>
-          <p:nvPr>
-            <p:ph type="title"/>
-          </p:nvPr>
-        </p:nvSpPr>
-        <p:spPr bwMode="auto"/>
-        <p:txBody>
-          <a:bodyPr/>
-          <a:lstStyle/>
-          <a:p>
-            <a:pPr>
-              <a:defRPr/>
-            </a:pPr>
-            <a:r>
-              <a:rPr lang="fr-FR" dirty="0"/>
-              <a:t>Le métier de technicien informatique</a:t>
-            </a:r>
-          </a:p>
-        </p:txBody>
-      </p:sp>
-      <p:sp>
-        <p:nvSpPr>
-          <p:cNvPr id="3" name="Espace réservé du contenu 2"/>
-          <p:cNvSpPr>
-            <a:spLocks noGrp="1"/>
-          </p:cNvSpPr>
-          <p:nvPr>
-            <p:ph idx="1"/>
-          </p:nvPr>
-        </p:nvSpPr>
-        <p:spPr bwMode="auto"/>
-        <p:txBody>
-          <a:bodyPr/>
-          <a:lstStyle/>
-          <a:p>
-            <a:r>
-              <a:rPr lang="fr-FR" dirty="0"/>
-              <a:t>Missions :</a:t>
-            </a:r>
-          </a:p>
-          <a:p>
-            <a:r>
-              <a:rPr lang="fr-FR" dirty="0"/>
-              <a:t>- Installation &amp; configuration</a:t>
-            </a:r>
-          </a:p>
-          <a:p>
-            <a:r>
-              <a:rPr lang="fr-FR" dirty="0"/>
-              <a:t>- Maintenance &amp; dépannage</a:t>
-            </a:r>
-          </a:p>
-          <a:p>
-            <a:r>
-              <a:rPr lang="fr-FR" dirty="0"/>
-              <a:t>- Support client</a:t>
-            </a:r>
-          </a:p>
-          <a:p>
-            <a:r>
-              <a:rPr lang="fr-FR" dirty="0"/>
-              <a:t>- Sécurité des données</a:t>
-            </a:r>
-          </a:p>
-          <a:p>
-            <a:endParaRPr lang="fr-FR" dirty="0"/>
-          </a:p>
-          <a:p>
-            <a:r>
-              <a:rPr lang="fr-FR" dirty="0"/>
-              <a:t>Qualités : rigueur, patience, compétences techniques</a:t>
-            </a:r>
-          </a:p>
-          <a:p>
-            <a:pPr>
-              <a:defRPr/>
-            </a:pPr>
-            <a:endParaRPr lang="fr-FR" dirty="0"/>
-          </a:p>
-        </p:txBody>
-      </p:sp>
-    </p:spTree>
-  </p:cSld>
-  <p:clrMapOvr>
-    <a:masterClrMapping/>
-  </p:clrMapOvr>
-  <mc:AlternateContent xmlns:mc="http://schemas.openxmlformats.org/markup-compatibility/2006" xmlns:p159="http://schemas.microsoft.com/office/powerpoint/2015/09/main">
-    <mc:Choice Requires="p159">
-      <p:transition xmlns:p14="http://schemas.microsoft.com/office/powerpoint/2010/main" spd="slow" p14:dur="2000" advClick="0">
-        <p:split orient="vert" dir="in"/>
-      </p:transition>
-    </mc:Choice>
-    <mc:Fallback xmlns="" xmlns:m="http://schemas.openxmlformats.org/officeDocument/2006/math" xmlns:w="http://schemas.openxmlformats.org/wordprocessingml/2006/main">
-      <p:transition spd="slow" advClick="0">
-        <p:split orient="vert" dir="in"/>
-      </p:transition>
-    </mc:Fallback>
-  </mc:AlternateContent>
-</p:sld>
-</file>
-
-<file path=ppt/slides/slide11.xml><?xml version="1.0" encoding="utf-8"?>
-<p:sld xmlns:a="http://schemas.openxmlformats.org/drawingml/2006/main" xmlns:r="http://schemas.openxmlformats.org/officeDocument/2006/relationships" xmlns:p="http://schemas.openxmlformats.org/presentationml/2006/main">
-  <p:cSld>
-    <p:spTree>
-      <p:nvGrpSpPr>
-        <p:cNvPr id="1" name=""/>
-        <p:cNvGrpSpPr/>
-        <p:nvPr/>
-      </p:nvGrpSpPr>
-      <p:grpSpPr>
-        <a:xfrm>
-          <a:off x="0" y="0"/>
-          <a:ext cx="0" cy="0"/>
-          <a:chOff x="0" y="0"/>
-          <a:chExt cx="0" cy="0"/>
-        </a:xfrm>
-      </p:grpSpPr>
-      <p:sp>
-        <p:nvSpPr>
-          <p:cNvPr id="2" name="Titre 1">
-            <a:extLst>
-              <a:ext uri="{FF2B5EF4-FFF2-40B4-BE49-F238E27FC236}">
-                <a16:creationId xmlns:a16="http://schemas.microsoft.com/office/drawing/2014/main" id="{E832A31D-734E-8072-466E-DE6D45B0B1EA}"/>
-              </a:ext>
-            </a:extLst>
-          </p:cNvPr>
-          <p:cNvSpPr>
-            <a:spLocks noGrp="1"/>
-          </p:cNvSpPr>
-          <p:nvPr>
-            <p:ph type="title"/>
-          </p:nvPr>
-        </p:nvSpPr>
-        <p:spPr/>
-        <p:txBody>
-          <a:bodyPr/>
-          <a:lstStyle/>
-          <a:p>
-            <a:r>
-              <a:rPr lang="fr-FR" dirty="0"/>
-              <a:t>Avantages &amp; Inconvénients</a:t>
-            </a:r>
-          </a:p>
-        </p:txBody>
-      </p:sp>
-      <p:sp>
-        <p:nvSpPr>
-          <p:cNvPr id="3" name="Espace réservé du contenu 2">
-            <a:extLst>
-              <a:ext uri="{FF2B5EF4-FFF2-40B4-BE49-F238E27FC236}">
-                <a16:creationId xmlns:a16="http://schemas.microsoft.com/office/drawing/2014/main" id="{C60C0EA9-E2A1-E1C2-20C6-3B7FAB34771C}"/>
-              </a:ext>
-            </a:extLst>
-          </p:cNvPr>
-          <p:cNvSpPr>
-            <a:spLocks noGrp="1"/>
-          </p:cNvSpPr>
-          <p:nvPr>
-            <p:ph idx="1"/>
-          </p:nvPr>
-        </p:nvSpPr>
-        <p:spPr/>
-        <p:txBody>
-          <a:bodyPr>
-            <a:normAutofit lnSpcReduction="10000"/>
-          </a:bodyPr>
-          <a:lstStyle/>
-          <a:p>
-            <a:r>
-              <a:rPr lang="fr-FR" dirty="0"/>
-              <a:t>Avantages :</a:t>
-            </a:r>
-          </a:p>
-          <a:p>
-            <a:r>
-              <a:rPr lang="fr-FR" dirty="0"/>
-              <a:t>- Métier recherché</a:t>
-            </a:r>
-          </a:p>
-          <a:p>
-            <a:r>
-              <a:rPr lang="fr-FR" dirty="0"/>
-              <a:t>- Travail varié</a:t>
-            </a:r>
-          </a:p>
-          <a:p>
-            <a:r>
-              <a:rPr lang="fr-FR" dirty="0"/>
-              <a:t>- Évolution possible</a:t>
-            </a:r>
-          </a:p>
-          <a:p>
-            <a:endParaRPr lang="fr-FR" dirty="0"/>
-          </a:p>
-          <a:p>
-            <a:r>
-              <a:rPr lang="fr-FR" dirty="0"/>
-              <a:t>Inconvénients :</a:t>
-            </a:r>
-          </a:p>
-          <a:p>
-            <a:r>
-              <a:rPr lang="fr-FR" dirty="0"/>
-              <a:t>- Déplacements</a:t>
-            </a:r>
-          </a:p>
-          <a:p>
-            <a:r>
-              <a:rPr lang="fr-FR" dirty="0"/>
-              <a:t>- Problèmes complexes</a:t>
-            </a:r>
-          </a:p>
-          <a:p>
-            <a:r>
-              <a:rPr lang="fr-FR" dirty="0"/>
-              <a:t>- Formation continue nécessaire</a:t>
-            </a:r>
-          </a:p>
-          <a:p>
-            <a:endParaRPr lang="fr-FR" dirty="0"/>
-          </a:p>
-        </p:txBody>
-      </p:sp>
-    </p:spTree>
-    <p:extLst>
-      <p:ext uri="{BB962C8B-B14F-4D97-AF65-F5344CB8AC3E}">
-        <p14:creationId xmlns:p14="http://schemas.microsoft.com/office/powerpoint/2010/main" val="2848188206"/>
-      </p:ext>
-    </p:extLst>
-  </p:cSld>
-  <p:clrMapOvr>
-    <a:masterClrMapping/>
-  </p:clrMapOvr>
-</p:sld>
-</file>
-
-<file path=ppt/slides/slide12.xml><?xml version="1.0" encoding="utf-8"?>
-<p:sld xmlns:a="http://schemas.openxmlformats.org/drawingml/2006/main" xmlns:r="http://schemas.openxmlformats.org/officeDocument/2006/relationships" xmlns:p="http://schemas.openxmlformats.org/presentationml/2006/main">
-  <p:cSld>
-    <p:spTree>
-      <p:nvGrpSpPr>
-        <p:cNvPr id="1" name=""/>
-        <p:cNvGrpSpPr/>
-        <p:nvPr/>
-      </p:nvGrpSpPr>
-      <p:grpSpPr>
-        <a:xfrm>
-          <a:off x="0" y="0"/>
-          <a:ext cx="0" cy="0"/>
-          <a:chOff x="0" y="0"/>
-          <a:chExt cx="0" cy="0"/>
-        </a:xfrm>
-      </p:grpSpPr>
-      <p:sp>
-        <p:nvSpPr>
-          <p:cNvPr id="2" name="Titre 1">
-            <a:extLst>
-              <a:ext uri="{FF2B5EF4-FFF2-40B4-BE49-F238E27FC236}">
-                <a16:creationId xmlns:a16="http://schemas.microsoft.com/office/drawing/2014/main" id="{91C3F3C1-96F6-ECDA-7C3A-95F8FC4DEABA}"/>
-              </a:ext>
-            </a:extLst>
-          </p:cNvPr>
-          <p:cNvSpPr>
-            <a:spLocks noGrp="1"/>
-          </p:cNvSpPr>
-          <p:nvPr>
-            <p:ph type="title"/>
-          </p:nvPr>
-        </p:nvSpPr>
-        <p:spPr/>
-        <p:txBody>
-          <a:bodyPr/>
-          <a:lstStyle/>
-          <a:p>
-            <a:r>
-              <a:rPr lang="fr-FR" dirty="0"/>
-              <a:t>Conclusion</a:t>
-            </a:r>
-          </a:p>
-        </p:txBody>
-      </p:sp>
-      <p:sp>
-        <p:nvSpPr>
-          <p:cNvPr id="3" name="Espace réservé du contenu 2">
-            <a:extLst>
-              <a:ext uri="{FF2B5EF4-FFF2-40B4-BE49-F238E27FC236}">
-                <a16:creationId xmlns:a16="http://schemas.microsoft.com/office/drawing/2014/main" id="{4179C5D7-6C6A-173B-7D52-DF3797DBB25E}"/>
-              </a:ext>
-            </a:extLst>
-          </p:cNvPr>
-          <p:cNvSpPr>
-            <a:spLocks noGrp="1"/>
-          </p:cNvSpPr>
-          <p:nvPr>
-            <p:ph idx="1"/>
-          </p:nvPr>
-        </p:nvSpPr>
-        <p:spPr/>
-        <p:txBody>
-          <a:bodyPr/>
-          <a:lstStyle/>
-          <a:p>
-            <a:r>
-              <a:rPr lang="fr-FR" dirty="0"/>
-              <a:t>Stage très enrichissant</a:t>
-            </a:r>
-          </a:p>
-          <a:p>
-            <a:r>
-              <a:rPr lang="fr-FR" dirty="0"/>
-              <a:t>Découverte du travail en équipe</a:t>
-            </a:r>
-          </a:p>
-          <a:p>
-            <a:r>
-              <a:rPr lang="fr-FR" dirty="0"/>
-              <a:t>Compréhension du monde professionnel</a:t>
-            </a:r>
-          </a:p>
-          <a:p>
-            <a:endParaRPr lang="fr-FR" dirty="0"/>
-          </a:p>
-          <a:p>
-            <a:r>
-              <a:rPr lang="fr-FR"/>
-              <a:t>Confirme mon projet d’orientation vers l’informatique</a:t>
-            </a:r>
-          </a:p>
-          <a:p>
-            <a:endParaRPr lang="fr-FR"/>
-          </a:p>
-        </p:txBody>
-      </p:sp>
-    </p:spTree>
-    <p:extLst>
-      <p:ext uri="{BB962C8B-B14F-4D97-AF65-F5344CB8AC3E}">
-        <p14:creationId xmlns:p14="http://schemas.microsoft.com/office/powerpoint/2010/main" val="2194036470"/>
-      </p:ext>
-    </p:extLst>
-  </p:cSld>
-  <p:clrMapOvr>
-    <a:masterClrMapping/>
-  </p:clrMapOvr>
 </p:sld>
 </file>
 
@@ -7708,24 +6995,6 @@
             </a:pPr>
             <a:r>
               <a:rPr lang="fr-FR" dirty="0"/>
-              <a:t>Organisation de l’agence</a:t>
-            </a:r>
-          </a:p>
-          <a:p>
-            <a:pPr>
-              <a:defRPr/>
-            </a:pPr>
-            <a:r>
-              <a:rPr lang="fr-FR" dirty="0"/>
-              <a:t>Briefing &amp; Débriefing </a:t>
-            </a:r>
-          </a:p>
-          <a:p>
-            <a:pPr>
-              <a:defRPr/>
-            </a:pPr>
-            <a:r>
-              <a:rPr lang="fr-FR" dirty="0"/>
               <a:t>Mes activités pendant le stage</a:t>
             </a:r>
           </a:p>
@@ -7744,7 +7013,7 @@
             </a:pPr>
             <a:r>
               <a:rPr lang="fr-FR" dirty="0"/>
-              <a:t>Outils professionnels utilisés</a:t>
+              <a:t>Le métier de technicien informatique</a:t>
             </a:r>
           </a:p>
           <a:p>
@@ -7753,16 +7022,7 @@
             </a:pPr>
             <a:r>
               <a:rPr lang="fr-FR" dirty="0"/>
-              <a:t>Le métier de technicien informatique</a:t>
-            </a:r>
-          </a:p>
-          <a:p>
-            <a:pPr>
-              <a:defRPr/>
-            </a:pPr>
-            <a:r>
-              <a:rPr lang="fr-FR" dirty="0"/>
-              <a:t>Avantages &amp; Inconvénients</a:t>
+              <a:t>Mon Projet Professionnel </a:t>
             </a:r>
           </a:p>
           <a:p>
@@ -7791,7 +7051,7 @@
         </p:blipFill>
         <p:spPr bwMode="auto">
           <a:xfrm>
-            <a:off x="4079081" y="333373"/>
+            <a:off x="4345781" y="813008"/>
             <a:ext cx="8491276" cy="4562476"/>
           </a:xfrm>
           <a:prstGeom prst="rect">
@@ -7810,7 +7070,7 @@
         <p:split orient="vert" dir="in"/>
       </p:transition>
     </mc:Choice>
-    <mc:Fallback xmlns="" xmlns:m="http://schemas.openxmlformats.org/officeDocument/2006/math" xmlns:w="http://schemas.openxmlformats.org/wordprocessingml/2006/main">
+    <mc:Fallback xmlns:w="http://schemas.openxmlformats.org/wordprocessingml/2006/main" xmlns:m="http://schemas.openxmlformats.org/officeDocument/2006/math" xmlns="">
       <p:transition spd="slow" advClick="0">
         <p:split orient="vert" dir="in"/>
       </p:transition>
@@ -7964,46 +7224,27 @@
             <p:ph type="title"/>
           </p:nvPr>
         </p:nvSpPr>
-        <p:spPr bwMode="auto"/>
-        <p:txBody>
-          <a:bodyPr/>
-          <a:lstStyle/>
-          <a:p>
-            <a:pPr>
-              <a:defRPr/>
-            </a:pPr>
-            <a:r>
-              <a:rPr lang="fr-FR"/>
-              <a:t>présentation</a:t>
-            </a:r>
-            <a:endParaRPr/>
-          </a:p>
-        </p:txBody>
-      </p:sp>
-      <p:pic>
-        <p:nvPicPr>
-          <p:cNvPr id="6" name="Espace réservé du contenu 5"/>
-          <p:cNvPicPr>
-            <a:picLocks noGrp="1" noChangeAspect="1"/>
-          </p:cNvPicPr>
-          <p:nvPr>
-            <p:ph idx="1"/>
-          </p:nvPr>
-        </p:nvPicPr>
-        <p:blipFill>
-          <a:blip r:embed="rId3"/>
-          <a:stretch/>
-        </p:blipFill>
         <p:spPr bwMode="auto">
           <a:xfrm>
-            <a:off x="6859389" y="425318"/>
-            <a:ext cx="4505522" cy="6007364"/>
+            <a:off x="400051" y="105687"/>
+            <a:ext cx="10131425" cy="1456267"/>
           </a:xfrm>
-          <a:prstGeom prst="rect">
-            <a:avLst/>
-          </a:prstGeom>
         </p:spPr>
-      </p:pic>
+        <p:txBody>
+          <a:bodyPr/>
+          <a:lstStyle/>
+          <a:p>
+            <a:pPr>
+              <a:defRPr/>
+            </a:pPr>
+            <a:r>
+              <a:rPr lang="fr-FR" dirty="0"/>
+              <a:t>présentation</a:t>
+            </a:r>
+            <a:endParaRPr dirty="0"/>
+          </a:p>
+        </p:txBody>
+      </p:sp>
       <p:sp>
         <p:nvSpPr>
           <p:cNvPr id="7" name="ZoneTexte 6"/>
@@ -8012,7 +7253,7 @@
         </p:nvSpPr>
         <p:spPr bwMode="auto">
           <a:xfrm>
-            <a:off x="1681858" y="1828800"/>
+            <a:off x="526158" y="1413840"/>
             <a:ext cx="4181475" cy="1477328"/>
           </a:xfrm>
           <a:prstGeom prst="rect">
@@ -8033,7 +7274,7 @@
             </a:pPr>
             <a:r>
               <a:rPr lang="fr-FR" dirty="0"/>
-              <a:t>Daniel neau-inizan</a:t>
+              <a:t>Daniel Neau-Inizan</a:t>
             </a:r>
           </a:p>
           <a:p>
@@ -8067,7 +7308,7 @@
             </a:pPr>
             <a:r>
               <a:rPr lang="fr-FR" dirty="0"/>
-              <a:t>Goût pour le numérique, </a:t>
+              <a:t>Goût pour le numérique</a:t>
             </a:r>
             <a:endParaRPr dirty="0"/>
           </a:p>
@@ -8089,7 +7330,7 @@
         </p:nvSpPr>
         <p:spPr bwMode="auto">
           <a:xfrm>
-            <a:off x="1681857" y="3971925"/>
+            <a:off x="526158" y="2645826"/>
             <a:ext cx="2999236" cy="2012039"/>
           </a:xfrm>
           <a:prstGeom prst="rect">
@@ -8107,40 +7348,40 @@
               <a:defRPr/>
             </a:pPr>
             <a:r>
-              <a:rPr lang="fr-FR"/>
+              <a:rPr lang="fr-FR" dirty="0"/>
               <a:t>Recherche d’entreprise:</a:t>
             </a:r>
-            <a:endParaRPr/>
-          </a:p>
-          <a:p>
-            <a:pPr>
-              <a:defRPr/>
-            </a:pPr>
-            <a:r>
-              <a:rPr lang="fr-FR"/>
+            <a:endParaRPr dirty="0"/>
+          </a:p>
+          <a:p>
+            <a:pPr>
+              <a:defRPr/>
+            </a:pPr>
+            <a:r>
+              <a:rPr lang="fr-FR" dirty="0"/>
               <a:t> </a:t>
             </a:r>
-            <a:endParaRPr/>
-          </a:p>
-          <a:p>
-            <a:pPr>
-              <a:defRPr/>
-            </a:pPr>
-            <a:r>
-              <a:rPr lang="fr-FR"/>
+            <a:endParaRPr dirty="0"/>
+          </a:p>
+          <a:p>
+            <a:pPr>
+              <a:defRPr/>
+            </a:pPr>
+            <a:r>
+              <a:rPr lang="fr-FR" dirty="0"/>
               <a:t>- Sollicitation de la famille </a:t>
             </a:r>
-            <a:endParaRPr/>
-          </a:p>
-          <a:p>
-            <a:pPr>
-              <a:defRPr/>
-            </a:pPr>
-            <a:r>
-              <a:rPr lang="fr-FR"/>
+            <a:endParaRPr dirty="0"/>
+          </a:p>
+          <a:p>
+            <a:pPr>
+              <a:defRPr/>
+            </a:pPr>
+            <a:r>
+              <a:rPr lang="fr-FR" dirty="0"/>
               <a:t>- Création de mon cv:  Nom Prénom, Adresse, et les Expériences Réalisées,</a:t>
             </a:r>
-            <a:endParaRPr/>
+            <a:endParaRPr dirty="0"/>
           </a:p>
           <a:p>
             <a:pPr marL="285750" indent="-285750">
@@ -8148,10 +7389,96 @@
               <a:buChar char="-"/>
               <a:defRPr/>
             </a:pPr>
-            <a:endParaRPr lang="fr-FR"/>
-          </a:p>
-        </p:txBody>
-      </p:sp>
+            <a:endParaRPr lang="fr-FR" dirty="0"/>
+          </a:p>
+        </p:txBody>
+      </p:sp>
+      <p:sp>
+        <p:nvSpPr>
+          <p:cNvPr id="4" name="Espace réservé du contenu 3">
+            <a:extLst>
+              <a:ext uri="{FF2B5EF4-FFF2-40B4-BE49-F238E27FC236}">
+                <a16:creationId xmlns:a16="http://schemas.microsoft.com/office/drawing/2014/main" id="{533B0E2E-3D5B-F858-F946-A353370E2799}"/>
+              </a:ext>
+            </a:extLst>
+          </p:cNvPr>
+          <p:cNvSpPr>
+            <a:spLocks noGrp="1"/>
+          </p:cNvSpPr>
+          <p:nvPr>
+            <p:ph idx="1"/>
+          </p:nvPr>
+        </p:nvSpPr>
+        <p:spPr>
+          <a:xfrm>
+            <a:off x="400051" y="4715015"/>
+            <a:ext cx="3162300" cy="1572589"/>
+          </a:xfrm>
+        </p:spPr>
+        <p:txBody>
+          <a:bodyPr>
+            <a:noAutofit/>
+          </a:bodyPr>
+          <a:lstStyle/>
+          <a:p>
+            <a:pPr marL="0" indent="0">
+              <a:buNone/>
+            </a:pPr>
+            <a:r>
+              <a:rPr lang="fr-FR" dirty="0"/>
+              <a:t>Projet professionnel :</a:t>
+            </a:r>
+          </a:p>
+          <a:p>
+            <a:pPr marL="0" indent="0">
+              <a:buNone/>
+            </a:pPr>
+            <a:r>
+              <a:rPr lang="fr-FR" dirty="0"/>
+              <a:t>Techniciens informatiques </a:t>
+            </a:r>
+          </a:p>
+          <a:p>
+            <a:pPr marL="0" indent="0">
+              <a:buNone/>
+            </a:pPr>
+            <a:r>
+              <a:rPr lang="fr-FR" dirty="0"/>
+              <a:t> Depuis plusieurs années, je m’intéresse à l’informatique et au dépannage des ordinateurs. </a:t>
+            </a:r>
+          </a:p>
+        </p:txBody>
+      </p:sp>
+      <p:pic>
+        <p:nvPicPr>
+          <p:cNvPr id="12" name="Image 11">
+            <a:extLst>
+              <a:ext uri="{FF2B5EF4-FFF2-40B4-BE49-F238E27FC236}">
+                <a16:creationId xmlns:a16="http://schemas.microsoft.com/office/drawing/2014/main" id="{8D71BAAF-1D6E-D0A3-D9B5-ECBE7214A5FD}"/>
+              </a:ext>
+            </a:extLst>
+          </p:cNvPr>
+          <p:cNvPicPr>
+            <a:picLocks noChangeAspect="1"/>
+          </p:cNvPicPr>
+          <p:nvPr/>
+        </p:nvPicPr>
+        <p:blipFill>
+          <a:blip r:embed="rId3"/>
+          <a:stretch>
+            <a:fillRect/>
+          </a:stretch>
+        </p:blipFill>
+        <p:spPr>
+          <a:xfrm>
+            <a:off x="5911850" y="365125"/>
+            <a:ext cx="4325470" cy="6127750"/>
+          </a:xfrm>
+          <a:prstGeom prst="rect">
+            <a:avLst/>
+          </a:prstGeom>
+        </p:spPr>
+      </p:pic>
     </p:spTree>
   </p:cSld>
   <p:clrMapOvr>
@@ -8163,7 +7490,7 @@
         <p:split orient="vert" dir="in"/>
       </p:transition>
     </mc:Choice>
-    <mc:Fallback xmlns="" xmlns:m="http://schemas.openxmlformats.org/officeDocument/2006/math" xmlns:w="http://schemas.openxmlformats.org/wordprocessingml/2006/main">
+    <mc:Fallback xmlns:w="http://schemas.openxmlformats.org/wordprocessingml/2006/main" xmlns:m="http://schemas.openxmlformats.org/officeDocument/2006/math" xmlns="">
       <p:transition spd="slow" advClick="0">
         <p:split orient="vert" dir="in"/>
       </p:transition>
@@ -8542,7 +7869,7 @@
         </p:blipFill>
         <p:spPr bwMode="auto">
           <a:xfrm>
-            <a:off x="5751513" y="565700"/>
+            <a:off x="5707063" y="1803950"/>
             <a:ext cx="4362450" cy="1500167"/>
           </a:xfrm>
           <a:prstGeom prst="rect">
@@ -8551,113 +7878,6 @@
           <a:noFill/>
         </p:spPr>
       </p:pic>
-      <p:sp>
-        <p:nvSpPr>
-          <p:cNvPr id="6" name="ZoneTexte 5"/>
-          <p:cNvSpPr txBox="1"/>
-          <p:nvPr/>
-        </p:nvSpPr>
-        <p:spPr bwMode="auto">
-          <a:xfrm>
-            <a:off x="5751513" y="2946368"/>
-            <a:ext cx="4911726" cy="1754326"/>
-          </a:xfrm>
-          <a:prstGeom prst="rect">
-            <a:avLst/>
-          </a:prstGeom>
-          <a:noFill/>
-        </p:spPr>
-        <p:txBody>
-          <a:bodyPr wrap="square" rtlCol="0">
-            <a:spAutoFit/>
-          </a:bodyPr>
-          <a:lstStyle/>
-          <a:p>
-            <a:pPr marL="285750" indent="-285750">
-              <a:buFontTx/>
-              <a:buChar char="-"/>
-              <a:defRPr/>
-            </a:pPr>
-            <a:r>
-              <a:rPr lang="fr-FR" dirty="0"/>
-              <a:t>DOMAINE DE PRESTATAIRES INFORMATIQUE, Français,</a:t>
-            </a:r>
-            <a:endParaRPr dirty="0"/>
-          </a:p>
-          <a:p>
-            <a:pPr marL="285750" indent="-285750">
-              <a:buFontTx/>
-              <a:buChar char="-"/>
-              <a:defRPr/>
-            </a:pPr>
-            <a:r>
-              <a:rPr lang="en-US" dirty="0" err="1"/>
-              <a:t>Européens</a:t>
-            </a:r>
-            <a:r>
-              <a:rPr lang="en-US" dirty="0"/>
-              <a:t> ( 190 </a:t>
-            </a:r>
-            <a:r>
-              <a:rPr lang="fr-FR" noProof="0" dirty="0"/>
-              <a:t>agences</a:t>
-            </a:r>
-            <a:r>
-              <a:rPr lang="en-US" dirty="0"/>
-              <a:t> dans </a:t>
-            </a:r>
-            <a:r>
-              <a:rPr lang="en-US" dirty="0" err="1"/>
-              <a:t>l’Europe</a:t>
-            </a:r>
-            <a:r>
-              <a:rPr lang="en-US" dirty="0"/>
-              <a:t> )</a:t>
-            </a:r>
-            <a:endParaRPr dirty="0"/>
-          </a:p>
-          <a:p>
-            <a:pPr marL="285750" indent="-285750">
-              <a:buFontTx/>
-              <a:buChar char="-"/>
-              <a:defRPr/>
-            </a:pPr>
-            <a:r>
-              <a:rPr lang="en-US" dirty="0"/>
-              <a:t>28 </a:t>
-            </a:r>
-            <a:r>
-              <a:rPr lang="en-US" dirty="0" err="1"/>
-              <a:t>ans</a:t>
-            </a:r>
-            <a:r>
-              <a:rPr lang="en-US" dirty="0"/>
-              <a:t>  par Sacha Rosental</a:t>
-            </a:r>
-            <a:endParaRPr dirty="0"/>
-          </a:p>
-          <a:p>
-            <a:pPr marL="285750" indent="-285750">
-              <a:buFontTx/>
-              <a:buChar char="-"/>
-              <a:defRPr/>
-            </a:pPr>
-            <a:r>
-              <a:rPr lang="fr-FR" dirty="0"/>
-              <a:t>2000 employés dans l’Europe,</a:t>
-            </a:r>
-            <a:endParaRPr dirty="0"/>
-          </a:p>
-          <a:p>
-            <a:pPr marL="285750" indent="-285750">
-              <a:buFontTx/>
-              <a:buChar char="-"/>
-              <a:defRPr/>
-            </a:pPr>
-            <a:endParaRPr lang="fr-FR" dirty="0"/>
-          </a:p>
-        </p:txBody>
-      </p:sp>
       <p:sp>
         <p:nvSpPr>
           <p:cNvPr id="8" name="ZoneTexte 7">
@@ -8713,6 +7933,44 @@
             <a:r>
               <a:rPr lang="fr-FR" dirty="0"/>
               <a:t>- Vente de matériel (serveurs, PC)</a:t>
+            </a:r>
+          </a:p>
+          <a:p>
+            <a:endParaRPr lang="fr-FR" dirty="0"/>
+          </a:p>
+        </p:txBody>
+      </p:sp>
+      <p:sp>
+        <p:nvSpPr>
+          <p:cNvPr id="3" name="ZoneTexte 2">
+            <a:extLst>
+              <a:ext uri="{FF2B5EF4-FFF2-40B4-BE49-F238E27FC236}">
+                <a16:creationId xmlns:a16="http://schemas.microsoft.com/office/drawing/2014/main" id="{2329AE7A-E929-4228-A2AC-C15A43583ADF}"/>
+              </a:ext>
+            </a:extLst>
+          </p:cNvPr>
+          <p:cNvSpPr txBox="1"/>
+          <p:nvPr/>
+        </p:nvSpPr>
+        <p:spPr>
+          <a:xfrm>
+            <a:off x="635000" y="3968750"/>
+            <a:ext cx="3359150" cy="1754326"/>
+          </a:xfrm>
+          <a:prstGeom prst="rect">
+            <a:avLst/>
+          </a:prstGeom>
+          <a:noFill/>
+        </p:spPr>
+        <p:txBody>
+          <a:bodyPr wrap="square" rtlCol="0">
+            <a:spAutoFit/>
+          </a:bodyPr>
+          <a:lstStyle/>
+          <a:p>
+            <a:r>
+              <a:rPr lang="fr-FR" dirty="0"/>
+              <a:t>XEFI est une entreprise spécialisée dans les services informatiques pour les entreprises : maintenance, cybersécurité et cloud.</a:t>
             </a:r>
           </a:p>
           <a:p>
@@ -8731,7 +7989,7 @@
         <p:split orient="vert" dir="in"/>
       </p:transition>
     </mc:Choice>
-    <mc:Fallback xmlns="" xmlns:m="http://schemas.openxmlformats.org/officeDocument/2006/math" xmlns:w="http://schemas.openxmlformats.org/wordprocessingml/2006/main">
+    <mc:Fallback xmlns:w="http://schemas.openxmlformats.org/wordprocessingml/2006/main" xmlns:m="http://schemas.openxmlformats.org/officeDocument/2006/math" xmlns="">
       <p:transition spd="slow" advClick="0">
         <p:split orient="vert" dir="in"/>
       </p:transition>
@@ -8767,7 +8025,12 @@
             <p:ph type="title"/>
           </p:nvPr>
         </p:nvSpPr>
-        <p:spPr bwMode="auto"/>
+        <p:spPr bwMode="auto">
+          <a:xfrm>
+            <a:off x="534987" y="153457"/>
+            <a:ext cx="10131425" cy="1456267"/>
+          </a:xfrm>
+        </p:spPr>
         <p:txBody>
           <a:bodyPr/>
           <a:lstStyle/>
@@ -8777,7 +8040,7 @@
             </a:pPr>
             <a:r>
               <a:rPr lang="fr-FR" dirty="0"/>
-              <a:t>Organisation de l’agence</a:t>
+              <a:t>Mes activités pendant le stage</a:t>
             </a:r>
             <a:br>
               <a:rPr lang="fr-FR" dirty="0"/>
@@ -8798,8 +8061,8 @@
         </p:nvSpPr>
         <p:spPr bwMode="auto">
           <a:xfrm>
-            <a:off x="542927" y="1604433"/>
-            <a:ext cx="4076698" cy="3649132"/>
+            <a:off x="596901" y="715962"/>
+            <a:ext cx="4914899" cy="2984499"/>
           </a:xfrm>
         </p:spPr>
         <p:txBody>
@@ -8809,36 +8072,185 @@
           <a:lstStyle/>
           <a:p>
             <a:r>
-              <a:rPr lang="fr-FR" sz="1600" dirty="0"/>
-              <a:t>Directeur d’agence : M. Sanchez</a:t>
-            </a:r>
-          </a:p>
-          <a:p>
-            <a:r>
-              <a:rPr lang="fr-FR" sz="1600" dirty="0"/>
-              <a:t>Responsable technique : M. Ferrat</a:t>
-            </a:r>
-          </a:p>
-          <a:p>
-            <a:r>
-              <a:rPr lang="fr-FR" sz="1600" dirty="0"/>
-              <a:t>Techniciens : Thomas, Alexis, Paul-Louis</a:t>
-            </a:r>
-          </a:p>
-          <a:p>
-            <a:r>
-              <a:rPr lang="fr-FR" sz="1600" dirty="0"/>
-              <a:t>Comptable : Laureline</a:t>
-            </a:r>
-          </a:p>
-          <a:p>
-            <a:endParaRPr lang="fr-FR" sz="1600" dirty="0"/>
-          </a:p>
-          <a:p>
-            <a:r>
-              <a:rPr lang="fr-FR" sz="1600" dirty="0"/>
-              <a:t>Travail en équipe et réunions chaque lundi (briefing / débriefing)</a:t>
-            </a:r>
+              <a:rPr lang="fr-FR" dirty="0"/>
+              <a:t>- Ouverture et lecture des mails</a:t>
+            </a:r>
+          </a:p>
+          <a:p>
+            <a:r>
+              <a:rPr lang="fr-FR" dirty="0"/>
+              <a:t>- Préparation du briefing</a:t>
+            </a:r>
+          </a:p>
+          <a:p>
+            <a:r>
+              <a:rPr lang="fr-FR" dirty="0"/>
+              <a:t>- Gestion et suivi des tickets (</a:t>
+            </a:r>
+            <a:r>
+              <a:rPr lang="fr-FR" dirty="0" err="1"/>
+              <a:t>Zendesk</a:t>
+            </a:r>
+            <a:r>
+              <a:rPr lang="fr-FR" dirty="0"/>
+              <a:t>)</a:t>
+            </a:r>
+          </a:p>
+          <a:p>
+            <a:r>
+              <a:rPr lang="fr-FR" dirty="0"/>
+              <a:t>- Maintenance et réinstallation de Windows</a:t>
+            </a:r>
+          </a:p>
+          <a:p>
+            <a:r>
+              <a:rPr lang="fr-FR" dirty="0"/>
+              <a:t>- Enregistrement des PC dans </a:t>
+            </a:r>
+            <a:r>
+              <a:rPr lang="fr-FR" dirty="0" err="1"/>
+              <a:t>Tactical</a:t>
+            </a:r>
+            <a:r>
+              <a:rPr lang="fr-FR" dirty="0"/>
+              <a:t> RMM</a:t>
+            </a:r>
+          </a:p>
+          <a:p>
+            <a:pPr>
+              <a:defRPr/>
+            </a:pPr>
+            <a:endParaRPr lang="fr-FR" dirty="0"/>
+          </a:p>
+        </p:txBody>
+      </p:sp>
+      <p:pic>
+        <p:nvPicPr>
+          <p:cNvPr id="5122" name="Picture 2"/>
+          <p:cNvPicPr>
+            <a:picLocks noChangeAspect="1" noChangeArrowheads="1"/>
+          </p:cNvPicPr>
+          <p:nvPr/>
+        </p:nvPicPr>
+        <p:blipFill>
+          <a:blip r:embed="rId3"/>
+          <a:stretch/>
+        </p:blipFill>
+        <p:spPr bwMode="auto">
+          <a:xfrm>
+            <a:off x="7318375" y="1609723"/>
+            <a:ext cx="4181475" cy="4181475"/>
+          </a:xfrm>
+          <a:prstGeom prst="rect">
+            <a:avLst/>
+          </a:prstGeom>
+          <a:noFill/>
+        </p:spPr>
+      </p:pic>
+      <p:sp>
+        <p:nvSpPr>
+          <p:cNvPr id="4" name="ZoneTexte 3">
+            <a:extLst>
+              <a:ext uri="{FF2B5EF4-FFF2-40B4-BE49-F238E27FC236}">
+                <a16:creationId xmlns:a16="http://schemas.microsoft.com/office/drawing/2014/main" id="{1FAF885B-3308-7644-12E3-5963F26CEB9A}"/>
+              </a:ext>
+            </a:extLst>
+          </p:cNvPr>
+          <p:cNvSpPr txBox="1"/>
+          <p:nvPr/>
+        </p:nvSpPr>
+        <p:spPr>
+          <a:xfrm>
+            <a:off x="433387" y="3816240"/>
+            <a:ext cx="8213724" cy="646331"/>
+          </a:xfrm>
+          <a:prstGeom prst="rect">
+            <a:avLst/>
+          </a:prstGeom>
+          <a:noFill/>
+        </p:spPr>
+        <p:txBody>
+          <a:bodyPr wrap="square" rtlCol="0">
+            <a:spAutoFit/>
+          </a:bodyPr>
+          <a:lstStyle/>
+          <a:p>
+            <a:r>
+              <a:rPr lang="fr-FR" sz="3600" dirty="0">
+                <a:latin typeface="+mj-lt"/>
+              </a:rPr>
+              <a:t>Interventions techniques observées</a:t>
+            </a:r>
+          </a:p>
+        </p:txBody>
+      </p:sp>
+      <p:sp>
+        <p:nvSpPr>
+          <p:cNvPr id="5" name="ZoneTexte 4">
+            <a:extLst>
+              <a:ext uri="{FF2B5EF4-FFF2-40B4-BE49-F238E27FC236}">
+                <a16:creationId xmlns:a16="http://schemas.microsoft.com/office/drawing/2014/main" id="{8BD5D720-3BD4-D754-3C37-EAB1725C8CFB}"/>
+              </a:ext>
+            </a:extLst>
+          </p:cNvPr>
+          <p:cNvSpPr txBox="1"/>
+          <p:nvPr/>
+        </p:nvSpPr>
+        <p:spPr>
+          <a:xfrm>
+            <a:off x="596901" y="4578350"/>
+            <a:ext cx="6267450" cy="1754326"/>
+          </a:xfrm>
+          <a:prstGeom prst="rect">
+            <a:avLst/>
+          </a:prstGeom>
+          <a:noFill/>
+        </p:spPr>
+        <p:txBody>
+          <a:bodyPr wrap="square" rtlCol="0">
+            <a:spAutoFit/>
+          </a:bodyPr>
+          <a:lstStyle/>
+          <a:p>
+            <a:r>
+              <a:rPr lang="fr-FR" dirty="0"/>
+              <a:t>- Installation Windows via serveur local</a:t>
+            </a:r>
+          </a:p>
+          <a:p>
+            <a:r>
+              <a:rPr lang="fr-FR" dirty="0"/>
+              <a:t>- Diagnostic matériel (RAM, disque dur)</a:t>
+            </a:r>
+          </a:p>
+          <a:p>
+            <a:r>
+              <a:rPr lang="fr-FR" dirty="0"/>
+              <a:t>- Test câble Ethernet et switch</a:t>
+            </a:r>
+          </a:p>
+          <a:p>
+            <a:r>
+              <a:rPr lang="fr-FR" dirty="0"/>
+              <a:t>- Intervention chez clients</a:t>
+            </a:r>
+          </a:p>
+          <a:p>
+            <a:r>
+              <a:rPr lang="fr-FR" dirty="0"/>
+              <a:t>- Utilisation </a:t>
+            </a:r>
+            <a:r>
+              <a:rPr lang="fr-FR" dirty="0" err="1"/>
+              <a:t>AnyDesk</a:t>
+            </a:r>
+            <a:r>
+              <a:rPr lang="fr-FR" dirty="0"/>
+              <a:t> pour prise à distance</a:t>
+            </a:r>
+          </a:p>
+          <a:p>
+            <a:endParaRPr lang="fr-FR" dirty="0"/>
           </a:p>
         </p:txBody>
       </p:sp>
@@ -8853,7 +8265,7 @@
         <p:split orient="vert" dir="in"/>
       </p:transition>
     </mc:Choice>
-    <mc:Fallback xmlns="" xmlns:m="http://schemas.openxmlformats.org/officeDocument/2006/math" xmlns:w="http://schemas.openxmlformats.org/wordprocessingml/2006/main">
+    <mc:Fallback xmlns:w="http://schemas.openxmlformats.org/wordprocessingml/2006/main" xmlns:m="http://schemas.openxmlformats.org/officeDocument/2006/math" xmlns="">
       <p:transition spd="slow" advClick="0">
         <p:split orient="vert" dir="in"/>
       </p:transition>
@@ -8899,79 +8311,68 @@
             </a:pPr>
             <a:r>
               <a:rPr lang="fr-FR" dirty="0"/>
-              <a:t>Briefing &amp; Débriefing</a:t>
-            </a:r>
-            <a:br>
+              <a:t>Le métier de technicien informatique</a:t>
+            </a:r>
+          </a:p>
+        </p:txBody>
+      </p:sp>
+      <p:sp>
+        <p:nvSpPr>
+          <p:cNvPr id="3" name="Espace réservé du contenu 2"/>
+          <p:cNvSpPr>
+            <a:spLocks noGrp="1"/>
+          </p:cNvSpPr>
+          <p:nvPr>
+            <p:ph idx="1"/>
+          </p:nvPr>
+        </p:nvSpPr>
+        <p:spPr bwMode="auto"/>
+        <p:txBody>
+          <a:bodyPr/>
+          <a:lstStyle/>
+          <a:p>
+            <a:r>
               <a:rPr lang="fr-FR" dirty="0"/>
-            </a:br>
+              <a:t>Missions :</a:t>
+            </a:r>
+          </a:p>
+          <a:p>
+            <a:r>
+              <a:rPr lang="fr-FR" dirty="0"/>
+              <a:t>- Installation &amp; configuration</a:t>
+            </a:r>
+          </a:p>
+          <a:p>
+            <a:r>
+              <a:rPr lang="fr-FR" dirty="0"/>
+              <a:t>- Maintenance &amp; dépannage</a:t>
+            </a:r>
+          </a:p>
+          <a:p>
+            <a:r>
+              <a:rPr lang="fr-FR" dirty="0"/>
+              <a:t>- Aider les clients à résoudre des problèmes à distance.</a:t>
+            </a:r>
+          </a:p>
+          <a:p>
+            <a:r>
+              <a:rPr lang="fr-FR" dirty="0"/>
+              <a:t>- Sécurité des données</a:t>
+            </a:r>
+          </a:p>
+          <a:p>
+            <a:r>
+              <a:rPr lang="fr-FR" dirty="0"/>
+              <a:t>- Changer une barrette RAM défectueuse ou réinstaller Windows.</a:t>
+            </a:r>
+          </a:p>
+          <a:p>
             <a:endParaRPr lang="fr-FR" dirty="0"/>
           </a:p>
-        </p:txBody>
-      </p:sp>
-      <p:sp>
-        <p:nvSpPr>
-          <p:cNvPr id="3" name="Espace réservé du contenu 2"/>
-          <p:cNvSpPr>
-            <a:spLocks noGrp="1"/>
-          </p:cNvSpPr>
-          <p:nvPr>
-            <p:ph idx="1"/>
-          </p:nvPr>
-        </p:nvSpPr>
-        <p:spPr bwMode="auto">
-          <a:xfrm>
-            <a:off x="685801" y="2142067"/>
-            <a:ext cx="6153149" cy="3649132"/>
-          </a:xfrm>
-        </p:spPr>
-        <p:txBody>
-          <a:bodyPr>
-            <a:normAutofit/>
-          </a:bodyPr>
-          <a:lstStyle/>
           <a:p>
             <a:r>
               <a:rPr lang="fr-FR" dirty="0"/>
-              <a:t>Briefing :</a:t>
-            </a:r>
-          </a:p>
-          <a:p>
-            <a:r>
-              <a:rPr lang="fr-FR" dirty="0"/>
-              <a:t>- Fixer les objectifs</a:t>
-            </a:r>
-          </a:p>
-          <a:p>
-            <a:r>
-              <a:rPr lang="fr-FR" dirty="0"/>
-              <a:t>- Transmettre les informations importantes</a:t>
-            </a:r>
-          </a:p>
-          <a:p>
-            <a:endParaRPr lang="fr-FR" dirty="0"/>
-          </a:p>
-          <a:p>
-            <a:r>
-              <a:rPr lang="fr-FR" dirty="0"/>
-              <a:t>Débriefing :</a:t>
-            </a:r>
-          </a:p>
-          <a:p>
-            <a:r>
-              <a:rPr lang="fr-FR" dirty="0"/>
-              <a:t>- Analyse des résultats</a:t>
-            </a:r>
-          </a:p>
-          <a:p>
-            <a:r>
-              <a:rPr lang="fr-FR" dirty="0"/>
-              <a:t>- Points à améliorer</a:t>
-            </a:r>
-          </a:p>
-          <a:p>
-            <a:r>
-              <a:rPr lang="fr-FR" dirty="0"/>
-              <a:t>- Organisation des nouveaux tickets</a:t>
+              <a:t>Qualités : rigueur, patience, compétences techniques</a:t>
             </a:r>
           </a:p>
           <a:p>
@@ -8993,7 +8394,7 @@
         <p:split orient="vert" dir="in"/>
       </p:transition>
     </mc:Choice>
-    <mc:Fallback xmlns="" xmlns:m="http://schemas.openxmlformats.org/officeDocument/2006/math" xmlns:w="http://schemas.openxmlformats.org/wordprocessingml/2006/main">
+    <mc:Fallback xmlns:w="http://schemas.openxmlformats.org/wordprocessingml/2006/main" xmlns:m="http://schemas.openxmlformats.org/officeDocument/2006/math" xmlns="">
       <p:transition spd="slow" advClick="0">
         <p:split orient="vert" dir="in"/>
       </p:transition>
@@ -9003,7 +8404,7 @@
 </file>
 
 <file path=ppt/slides/slide7.xml><?xml version="1.0" encoding="utf-8"?>
-<p:sld xmlns:a="http://schemas.openxmlformats.org/drawingml/2006/main" xmlns:r="http://schemas.openxmlformats.org/officeDocument/2006/relationships" xmlns:p="http://schemas.openxmlformats.org/presentationml/2006/main" showMasterPhAnim="0">
+<p:sld xmlns:a="http://schemas.openxmlformats.org/drawingml/2006/main" xmlns:r="http://schemas.openxmlformats.org/officeDocument/2006/relationships" xmlns:p="http://schemas.openxmlformats.org/presentationml/2006/main">
   <p:cSld>
     <p:spTree>
       <p:nvGrpSpPr>
@@ -9011,7 +8412,7 @@
         <p:cNvGrpSpPr/>
         <p:nvPr/>
       </p:nvGrpSpPr>
-      <p:grpSpPr bwMode="auto">
+      <p:grpSpPr>
         <a:xfrm>
           <a:off x="0" y="0"/>
           <a:ext cx="0" cy="0"/>
@@ -9021,7 +8422,13 @@
       </p:grpSpPr>
       <p:sp>
         <p:nvSpPr>
-          <p:cNvPr id="2" name="Titre 1"/>
+          <p:cNvPr id="2" name="Titre 1">
+            <a:extLst>
+              <a:ext uri="{FF2B5EF4-FFF2-40B4-BE49-F238E27FC236}">
+                <a16:creationId xmlns:a16="http://schemas.microsoft.com/office/drawing/2014/main" id="{ECCC9A69-DE4E-F365-0977-3638FD0BC39C}"/>
+              </a:ext>
+            </a:extLst>
+          </p:cNvPr>
           <p:cNvSpPr>
             <a:spLocks noGrp="1"/>
           </p:cNvSpPr>
@@ -9029,145 +8436,166 @@
             <p:ph type="title"/>
           </p:nvPr>
         </p:nvSpPr>
-        <p:spPr bwMode="auto"/>
-        <p:txBody>
-          <a:bodyPr/>
-          <a:lstStyle/>
-          <a:p>
-            <a:pPr>
-              <a:defRPr/>
-            </a:pPr>
-            <a:r>
-              <a:rPr lang="fr-FR" dirty="0"/>
-              <a:t>Mes activités pendant le stage</a:t>
-            </a:r>
-            <a:br>
-              <a:rPr lang="fr-FR" dirty="0"/>
-            </a:br>
-            <a:endParaRPr lang="fr-FR" dirty="0"/>
-          </a:p>
-        </p:txBody>
-      </p:sp>
-      <p:sp>
-        <p:nvSpPr>
-          <p:cNvPr id="3" name="Espace réservé du contenu 2"/>
-          <p:cNvSpPr>
-            <a:spLocks noGrp="1"/>
-          </p:cNvSpPr>
-          <p:nvPr>
-            <p:ph idx="1"/>
-          </p:nvPr>
-        </p:nvSpPr>
-        <p:spPr bwMode="auto">
+        <p:spPr>
           <a:xfrm>
-            <a:off x="685801" y="2142067"/>
-            <a:ext cx="6667499" cy="3649132"/>
+            <a:off x="685801" y="0"/>
+            <a:ext cx="10131425" cy="1456267"/>
           </a:xfrm>
         </p:spPr>
         <p:txBody>
+          <a:bodyPr/>
+          <a:lstStyle/>
+          <a:p>
+            <a:r>
+              <a:rPr lang="fr-FR" dirty="0"/>
+              <a:t>Mon Projet Professionnel </a:t>
+            </a:r>
+          </a:p>
+        </p:txBody>
+      </p:sp>
+      <p:sp>
+        <p:nvSpPr>
+          <p:cNvPr id="3" name="Espace réservé du contenu 2">
+            <a:extLst>
+              <a:ext uri="{FF2B5EF4-FFF2-40B4-BE49-F238E27FC236}">
+                <a16:creationId xmlns:a16="http://schemas.microsoft.com/office/drawing/2014/main" id="{513467F8-F86F-D580-D6AD-81C3343FF391}"/>
+              </a:ext>
+            </a:extLst>
+          </p:cNvPr>
+          <p:cNvSpPr>
+            <a:spLocks noGrp="1"/>
+          </p:cNvSpPr>
+          <p:nvPr>
+            <p:ph idx="1"/>
+          </p:nvPr>
+        </p:nvSpPr>
+        <p:spPr>
+          <a:xfrm>
+            <a:off x="685801" y="1365250"/>
+            <a:ext cx="4406899" cy="5333999"/>
+          </a:xfrm>
+        </p:spPr>
+        <p:txBody>
           <a:bodyPr>
-            <a:normAutofit/>
+            <a:normAutofit fontScale="25000" lnSpcReduction="20000"/>
           </a:bodyPr>
           <a:lstStyle/>
           <a:p>
-            <a:r>
-              <a:rPr lang="fr-FR" dirty="0"/>
-              <a:t>- Ouverture et lecture des mails</a:t>
-            </a:r>
-          </a:p>
-          <a:p>
-            <a:r>
-              <a:rPr lang="fr-FR" dirty="0"/>
-              <a:t>- Préparation du briefing</a:t>
-            </a:r>
-          </a:p>
-          <a:p>
-            <a:r>
-              <a:rPr lang="fr-FR" dirty="0"/>
-              <a:t>- Gestion et suivi des tickets (</a:t>
-            </a:r>
-            <a:r>
-              <a:rPr lang="fr-FR" dirty="0" err="1"/>
-              <a:t>Zendesk</a:t>
-            </a:r>
-            <a:r>
-              <a:rPr lang="fr-FR" dirty="0"/>
-              <a:t>)</a:t>
-            </a:r>
-          </a:p>
-          <a:p>
-            <a:r>
-              <a:rPr lang="fr-FR" dirty="0"/>
-              <a:t>- Maintenance et réinstallation de Windows</a:t>
-            </a:r>
-          </a:p>
-          <a:p>
-            <a:r>
-              <a:rPr lang="fr-FR" dirty="0"/>
-              <a:t>- Enregistrement des PC dans </a:t>
-            </a:r>
-            <a:r>
-              <a:rPr lang="fr-FR" dirty="0" err="1"/>
-              <a:t>Tactical</a:t>
-            </a:r>
-            <a:r>
-              <a:rPr lang="fr-FR" dirty="0"/>
-              <a:t> RMM</a:t>
-            </a:r>
-          </a:p>
-          <a:p>
-            <a:pPr>
-              <a:defRPr/>
-            </a:pPr>
+            <a:pPr marL="0" indent="0">
+              <a:buNone/>
+            </a:pPr>
+            <a:r>
+              <a:rPr lang="fr-FR" sz="7200" b="1" dirty="0"/>
+              <a:t>- Métier envisagé</a:t>
+            </a:r>
+          </a:p>
+          <a:p>
+            <a:r>
+              <a:rPr lang="fr-FR" sz="7200" dirty="0"/>
+              <a:t>Technicien informatique / cybersécurité</a:t>
+            </a:r>
+          </a:p>
+          <a:p>
+            <a:pPr marL="0" indent="0">
+              <a:buNone/>
+            </a:pPr>
+            <a:r>
+              <a:rPr lang="fr-FR" sz="7200" b="1" dirty="0"/>
+              <a:t>- Pourquoi ce métier m’intéresse</a:t>
+            </a:r>
+          </a:p>
+          <a:p>
+            <a:r>
+              <a:rPr lang="fr-FR" sz="7200" dirty="0"/>
+              <a:t>intérêt pour les ordinateurs </a:t>
+            </a:r>
+          </a:p>
+          <a:p>
+            <a:r>
+              <a:rPr lang="fr-FR" sz="7200" dirty="0"/>
+              <a:t>résolution de problèmes </a:t>
+            </a:r>
+          </a:p>
+          <a:p>
+            <a:r>
+              <a:rPr lang="fr-FR" sz="7200" dirty="0"/>
+              <a:t>nouvelles technologies </a:t>
+            </a:r>
+          </a:p>
+          <a:p>
+            <a:pPr marL="0" indent="0">
+              <a:buNone/>
+            </a:pPr>
+            <a:r>
+              <a:rPr lang="fr-FR" sz="7200" b="1" dirty="0"/>
+              <a:t>- Démarches effectuées</a:t>
+            </a:r>
+          </a:p>
+          <a:p>
+            <a:r>
+              <a:rPr lang="fr-FR" sz="7200" dirty="0"/>
+              <a:t>recherches ONISEP </a:t>
+            </a:r>
+          </a:p>
+          <a:p>
+            <a:r>
+              <a:rPr lang="fr-FR" sz="7200" dirty="0"/>
+              <a:t>discussions avec les techniciens </a:t>
+            </a:r>
+          </a:p>
+          <a:p>
+            <a:r>
+              <a:rPr lang="fr-FR" sz="7200" dirty="0"/>
+              <a:t>découverte du métier pendant le stage </a:t>
+            </a:r>
+          </a:p>
+          <a:p>
+            <a:pPr marL="0" indent="0">
+              <a:buNone/>
+            </a:pPr>
+            <a:r>
+              <a:rPr lang="fr-FR" sz="7200" b="1" dirty="0"/>
+              <a:t>- Études envisagées</a:t>
+            </a:r>
+          </a:p>
+          <a:p>
+            <a:r>
+              <a:rPr lang="fr-FR" sz="7200" dirty="0"/>
+              <a:t>Bac pro CIEL </a:t>
+            </a:r>
+          </a:p>
+          <a:p>
+            <a:r>
+              <a:rPr lang="fr-FR" sz="7200" dirty="0"/>
+              <a:t>BTS SIO </a:t>
+            </a:r>
+          </a:p>
+          <a:p>
+            <a:r>
+              <a:rPr lang="fr-FR" sz="7200" dirty="0"/>
+              <a:t>spécialisation cybersécurité</a:t>
+            </a:r>
+          </a:p>
+          <a:p>
             <a:endParaRPr lang="fr-FR" dirty="0"/>
           </a:p>
         </p:txBody>
       </p:sp>
-      <p:pic>
-        <p:nvPicPr>
-          <p:cNvPr id="5122" name="Picture 2"/>
-          <p:cNvPicPr>
-            <a:picLocks noChangeAspect="1" noChangeArrowheads="1"/>
-          </p:cNvPicPr>
-          <p:nvPr/>
-        </p:nvPicPr>
-        <p:blipFill>
-          <a:blip r:embed="rId3"/>
-          <a:stretch/>
-        </p:blipFill>
-        <p:spPr bwMode="auto">
-          <a:xfrm>
-            <a:off x="7305675" y="1609724"/>
-            <a:ext cx="4181475" cy="4181475"/>
-          </a:xfrm>
-          <a:prstGeom prst="rect">
-            <a:avLst/>
-          </a:prstGeom>
-          <a:noFill/>
-        </p:spPr>
-      </p:pic>
     </p:spTree>
+    <p:extLst>
+      <p:ext uri="{BB962C8B-B14F-4D97-AF65-F5344CB8AC3E}">
+        <p14:creationId xmlns:p14="http://schemas.microsoft.com/office/powerpoint/2010/main" val="2085630048"/>
+      </p:ext>
+    </p:extLst>
   </p:cSld>
   <p:clrMapOvr>
     <a:masterClrMapping/>
   </p:clrMapOvr>
-  <mc:AlternateContent xmlns:mc="http://schemas.openxmlformats.org/markup-compatibility/2006" xmlns:p159="http://schemas.microsoft.com/office/powerpoint/2015/09/main">
-    <mc:Choice Requires="p159">
-      <p:transition xmlns:p14="http://schemas.microsoft.com/office/powerpoint/2010/main" spd="slow" p14:dur="2000" advClick="0">
-        <p:split orient="vert" dir="in"/>
-      </p:transition>
-    </mc:Choice>
-    <mc:Fallback xmlns="" xmlns:m="http://schemas.openxmlformats.org/officeDocument/2006/math" xmlns:w="http://schemas.openxmlformats.org/wordprocessingml/2006/main">
-      <p:transition spd="slow" advClick="0">
-        <p:split orient="vert" dir="in"/>
-      </p:transition>
-    </mc:Fallback>
-  </mc:AlternateContent>
 </p:sld>
 </file>
 
 <file path=ppt/slides/slide8.xml><?xml version="1.0" encoding="utf-8"?>
-<p:sld xmlns:a="http://schemas.openxmlformats.org/drawingml/2006/main" xmlns:r="http://schemas.openxmlformats.org/officeDocument/2006/relationships" xmlns:p="http://schemas.openxmlformats.org/presentationml/2006/main" showMasterPhAnim="0">
+<p:sld xmlns:a="http://schemas.openxmlformats.org/drawingml/2006/main" xmlns:r="http://schemas.openxmlformats.org/officeDocument/2006/relationships" xmlns:p="http://schemas.openxmlformats.org/presentationml/2006/main">
   <p:cSld>
     <p:spTree>
       <p:nvGrpSpPr>
@@ -9175,7 +8603,7 @@
         <p:cNvGrpSpPr/>
         <p:nvPr/>
       </p:nvGrpSpPr>
-      <p:grpSpPr bwMode="auto">
+      <p:grpSpPr>
         <a:xfrm>
           <a:off x="0" y="0"/>
           <a:ext cx="0" cy="0"/>
@@ -9185,7 +8613,13 @@
       </p:grpSpPr>
       <p:sp>
         <p:nvSpPr>
-          <p:cNvPr id="2" name="Titre 1"/>
+          <p:cNvPr id="2" name="Titre 1">
+            <a:extLst>
+              <a:ext uri="{FF2B5EF4-FFF2-40B4-BE49-F238E27FC236}">
+                <a16:creationId xmlns:a16="http://schemas.microsoft.com/office/drawing/2014/main" id="{91C3F3C1-96F6-ECDA-7C3A-95F8FC4DEABA}"/>
+              </a:ext>
+            </a:extLst>
+          </p:cNvPr>
           <p:cNvSpPr>
             <a:spLocks noGrp="1"/>
           </p:cNvSpPr>
@@ -9193,220 +8627,82 @@
             <p:ph type="title"/>
           </p:nvPr>
         </p:nvSpPr>
-        <p:spPr bwMode="auto"/>
+        <p:spPr/>
         <p:txBody>
           <a:bodyPr/>
           <a:lstStyle/>
           <a:p>
-            <a:pPr>
-              <a:defRPr/>
-            </a:pPr>
             <a:r>
               <a:rPr lang="fr-FR" dirty="0"/>
-              <a:t>Interventions techniques observées </a:t>
-            </a:r>
-            <a:br>
+              <a:t>Conclusion</a:t>
+            </a:r>
+          </a:p>
+        </p:txBody>
+      </p:sp>
+      <p:sp>
+        <p:nvSpPr>
+          <p:cNvPr id="3" name="Espace réservé du contenu 2">
+            <a:extLst>
+              <a:ext uri="{FF2B5EF4-FFF2-40B4-BE49-F238E27FC236}">
+                <a16:creationId xmlns:a16="http://schemas.microsoft.com/office/drawing/2014/main" id="{4179C5D7-6C6A-173B-7D52-DF3797DBB25E}"/>
+              </a:ext>
+            </a:extLst>
+          </p:cNvPr>
+          <p:cNvSpPr>
+            <a:spLocks noGrp="1"/>
+          </p:cNvSpPr>
+          <p:nvPr>
+            <p:ph idx="1"/>
+          </p:nvPr>
+        </p:nvSpPr>
+        <p:spPr>
+          <a:xfrm>
+            <a:off x="685801" y="2142066"/>
+            <a:ext cx="10131425" cy="4265083"/>
+          </a:xfrm>
+        </p:spPr>
+        <p:txBody>
+          <a:bodyPr/>
+          <a:lstStyle/>
+          <a:p>
+            <a:r>
               <a:rPr lang="fr-FR" dirty="0"/>
-            </a:br>
+              <a:t>Stage très enrichissant</a:t>
+            </a:r>
+          </a:p>
+          <a:p>
+            <a:r>
+              <a:rPr lang="fr-FR" dirty="0"/>
+              <a:t>Découverte du travail en équipe</a:t>
+            </a:r>
+          </a:p>
+          <a:p>
+            <a:r>
+              <a:rPr lang="fr-FR" dirty="0"/>
+              <a:t>Compréhension du monde professionnel</a:t>
+            </a:r>
+          </a:p>
+          <a:p>
+            <a:r>
+              <a:rPr lang="fr-FR" dirty="0"/>
+              <a:t>Ce stage m’a permis de découvrir concrètement le métier de technicien informatique. J’ai particulièrement apprécié le dépannage et le contact avec les techniciens. Cette expérience a renforcé mon envie de poursuivre des études dans l’informatique, notamment vers un bac professionnel puis un BTS spécialisé.</a:t>
+            </a:r>
+          </a:p>
+          <a:p>
             <a:endParaRPr lang="fr-FR" dirty="0"/>
           </a:p>
         </p:txBody>
       </p:sp>
-      <p:sp>
-        <p:nvSpPr>
-          <p:cNvPr id="3" name="Espace réservé du contenu 2"/>
-          <p:cNvSpPr>
-            <a:spLocks noGrp="1"/>
-          </p:cNvSpPr>
-          <p:nvPr>
-            <p:ph idx="1"/>
-          </p:nvPr>
-        </p:nvSpPr>
-        <p:spPr bwMode="auto"/>
-        <p:txBody>
-          <a:bodyPr/>
-          <a:lstStyle/>
-          <a:p>
-            <a:r>
-              <a:rPr lang="fr-FR" dirty="0"/>
-              <a:t>- Installation Windows via serveur local</a:t>
-            </a:r>
-          </a:p>
-          <a:p>
-            <a:r>
-              <a:rPr lang="fr-FR" dirty="0"/>
-              <a:t>- Diagnostic matériel (RAM, disque dur)</a:t>
-            </a:r>
-          </a:p>
-          <a:p>
-            <a:r>
-              <a:rPr lang="fr-FR" dirty="0"/>
-              <a:t>- Test câble Ethernet et switch</a:t>
-            </a:r>
-          </a:p>
-          <a:p>
-            <a:r>
-              <a:rPr lang="fr-FR" dirty="0"/>
-              <a:t>- Intervention chez clients</a:t>
-            </a:r>
-          </a:p>
-          <a:p>
-            <a:r>
-              <a:rPr lang="fr-FR" dirty="0"/>
-              <a:t>- Utilisation </a:t>
-            </a:r>
-            <a:r>
-              <a:rPr lang="fr-FR" dirty="0" err="1"/>
-              <a:t>AnyDesk</a:t>
-            </a:r>
-            <a:r>
-              <a:rPr lang="fr-FR" dirty="0"/>
-              <a:t> pour prise à distance</a:t>
-            </a:r>
-          </a:p>
-          <a:p>
-            <a:pPr>
-              <a:defRPr/>
-            </a:pPr>
-            <a:endParaRPr lang="fr-FR" dirty="0"/>
-          </a:p>
-        </p:txBody>
-      </p:sp>
     </p:spTree>
+    <p:extLst>
+      <p:ext uri="{BB962C8B-B14F-4D97-AF65-F5344CB8AC3E}">
+        <p14:creationId xmlns:p14="http://schemas.microsoft.com/office/powerpoint/2010/main" val="2194036470"/>
+      </p:ext>
+    </p:extLst>
   </p:cSld>
   <p:clrMapOvr>
     <a:masterClrMapping/>
   </p:clrMapOvr>
-  <mc:AlternateContent xmlns:mc="http://schemas.openxmlformats.org/markup-compatibility/2006" xmlns:p159="http://schemas.microsoft.com/office/powerpoint/2015/09/main">
-    <mc:Choice Requires="p159">
-      <p:transition xmlns:p14="http://schemas.microsoft.com/office/powerpoint/2010/main" spd="slow" p14:dur="2000" advClick="0">
-        <p:split orient="vert" dir="in"/>
-      </p:transition>
-    </mc:Choice>
-    <mc:Fallback xmlns="" xmlns:m="http://schemas.openxmlformats.org/officeDocument/2006/math" xmlns:w="http://schemas.openxmlformats.org/wordprocessingml/2006/main">
-      <p:transition spd="slow" advClick="0">
-        <p:split orient="vert" dir="in"/>
-      </p:transition>
-    </mc:Fallback>
-  </mc:AlternateContent>
-</p:sld>
-</file>
-
-<file path=ppt/slides/slide9.xml><?xml version="1.0" encoding="utf-8"?>
-<p:sld xmlns:a="http://schemas.openxmlformats.org/drawingml/2006/main" xmlns:r="http://schemas.openxmlformats.org/officeDocument/2006/relationships" xmlns:p="http://schemas.openxmlformats.org/presentationml/2006/main" showMasterPhAnim="0">
-  <p:cSld>
-    <p:spTree>
-      <p:nvGrpSpPr>
-        <p:cNvPr id="1" name=""/>
-        <p:cNvGrpSpPr/>
-        <p:nvPr/>
-      </p:nvGrpSpPr>
-      <p:grpSpPr bwMode="auto">
-        <a:xfrm>
-          <a:off x="0" y="0"/>
-          <a:ext cx="0" cy="0"/>
-          <a:chOff x="0" y="0"/>
-          <a:chExt cx="0" cy="0"/>
-        </a:xfrm>
-      </p:grpSpPr>
-      <p:sp>
-        <p:nvSpPr>
-          <p:cNvPr id="2" name="Titre 1"/>
-          <p:cNvSpPr>
-            <a:spLocks noGrp="1"/>
-          </p:cNvSpPr>
-          <p:nvPr>
-            <p:ph type="title"/>
-          </p:nvPr>
-        </p:nvSpPr>
-        <p:spPr bwMode="auto"/>
-        <p:txBody>
-          <a:bodyPr/>
-          <a:lstStyle/>
-          <a:p>
-            <a:pPr>
-              <a:defRPr/>
-            </a:pPr>
-            <a:r>
-              <a:rPr lang="fr-FR" dirty="0"/>
-              <a:t>Outils professionnels utilisés</a:t>
-            </a:r>
-            <a:endParaRPr dirty="0"/>
-          </a:p>
-        </p:txBody>
-      </p:sp>
-      <p:sp>
-        <p:nvSpPr>
-          <p:cNvPr id="3" name="Espace réservé du contenu 2"/>
-          <p:cNvSpPr>
-            <a:spLocks noGrp="1"/>
-          </p:cNvSpPr>
-          <p:nvPr>
-            <p:ph idx="1"/>
-          </p:nvPr>
-        </p:nvSpPr>
-        <p:spPr bwMode="auto"/>
-        <p:txBody>
-          <a:bodyPr/>
-          <a:lstStyle/>
-          <a:p>
-            <a:r>
-              <a:rPr lang="fr-FR" dirty="0" err="1"/>
-              <a:t>Zendesk</a:t>
-            </a:r>
-            <a:r>
-              <a:rPr lang="fr-FR" dirty="0"/>
-              <a:t> : gestion des tickets</a:t>
-            </a:r>
-          </a:p>
-          <a:p>
-            <a:r>
-              <a:rPr lang="fr-FR" dirty="0" err="1"/>
-              <a:t>AnyDesk</a:t>
-            </a:r>
-            <a:r>
-              <a:rPr lang="fr-FR" dirty="0"/>
-              <a:t> : prise en main à distance</a:t>
-            </a:r>
-          </a:p>
-          <a:p>
-            <a:r>
-              <a:rPr lang="fr-FR" dirty="0" err="1"/>
-              <a:t>Tactical</a:t>
-            </a:r>
-            <a:r>
-              <a:rPr lang="fr-FR" dirty="0"/>
-              <a:t> RMM : gestion du parc informatique</a:t>
-            </a:r>
-          </a:p>
-          <a:p>
-            <a:endParaRPr lang="fr-FR" dirty="0"/>
-          </a:p>
-          <a:p>
-            <a:r>
-              <a:rPr lang="fr-FR" dirty="0"/>
-              <a:t>Importance de la documentation et du suivi</a:t>
-            </a:r>
-          </a:p>
-        </p:txBody>
-      </p:sp>
-    </p:spTree>
-  </p:cSld>
-  <p:clrMapOvr>
-    <a:masterClrMapping/>
-  </p:clrMapOvr>
-  <mc:AlternateContent xmlns:mc="http://schemas.openxmlformats.org/markup-compatibility/2006" xmlns:p159="http://schemas.microsoft.com/office/powerpoint/2015/09/main">
-    <mc:Choice Requires="p159">
-      <p:transition xmlns:p14="http://schemas.microsoft.com/office/powerpoint/2010/main" spd="slow" p14:dur="2000" advClick="0">
-        <p:split orient="vert" dir="in"/>
-      </p:transition>
-    </mc:Choice>
-    <mc:Fallback xmlns="" xmlns:m="http://schemas.openxmlformats.org/officeDocument/2006/math" xmlns:w="http://schemas.openxmlformats.org/wordprocessingml/2006/main">
-      <p:transition spd="slow" advClick="0">
-        <p:split orient="vert" dir="in"/>
-      </p:transition>
-    </mc:Fallback>
-  </mc:AlternateContent>
 </p:sld>
 </file>
 
